--- a/theory_12-regulation_on_data_protection/theory_12-regulation_on_data_protection.pptx
+++ b/theory_12-regulation_on_data_protection/theory_12-regulation_on_data_protection.pptx
@@ -228,7 +228,7 @@
           <a:p>
             <a:fld id="{251090E0-FB0C-49E9-9864-9F53EABEA96F}" type="datetimeFigureOut">
               <a:rPr lang="en-GB" smtClean="0"/>
-              <a:t>13/05/2024</a:t>
+              <a:t>05/05/2025</a:t>
             </a:fld>
             <a:endParaRPr lang="en-GB"/>
           </a:p>
@@ -4774,7 +4774,9 @@
           <a:lstStyle>
             <a:lvl1pPr marL="0" indent="0" algn="ctr">
               <a:buNone/>
-              <a:defRPr sz="4800" b="1"/>
+              <a:defRPr sz="4800" b="1">
+                <a:latin typeface="Aptos" panose="020B0004020202020204" pitchFamily="34" charset="0"/>
+              </a:defRPr>
             </a:lvl1pPr>
             <a:lvl2pPr marL="457200" indent="0" algn="ctr">
               <a:buNone/>
@@ -4860,7 +4862,9 @@
           <a:lstStyle/>
           <a:p>
             <a:pPr algn="ctr"/>
-            <a:endParaRPr lang="en-GB" dirty="0"/>
+            <a:endParaRPr lang="en-GB" dirty="0">
+              <a:latin typeface="Aptos" panose="020B0004020202020204" pitchFamily="34" charset="0"/>
+            </a:endParaRPr>
           </a:p>
         </p:txBody>
       </p:sp>
@@ -4910,7 +4914,9 @@
           <a:lstStyle/>
           <a:p>
             <a:pPr algn="ctr"/>
-            <a:endParaRPr lang="en-GB" dirty="0"/>
+            <a:endParaRPr lang="en-GB" dirty="0">
+              <a:latin typeface="Aptos" panose="020B0004020202020204" pitchFamily="34" charset="0"/>
+            </a:endParaRPr>
           </a:p>
         </p:txBody>
       </p:sp>
@@ -4956,36 +4962,52 @@
           </a:lstStyle>
           <a:p>
             <a:r>
-              <a:rPr lang="it-IT" sz="2800" b="0" dirty="0" err="1"/>
+              <a:rPr lang="it-IT" sz="2800" b="0" dirty="0" err="1">
+                <a:latin typeface="Aptos" panose="020B0004020202020204" pitchFamily="34" charset="0"/>
+              </a:rPr>
               <a:t>Biomedical</a:t>
             </a:r>
             <a:r>
-              <a:rPr lang="it-IT" sz="2800" b="0" dirty="0"/>
+              <a:rPr lang="it-IT" sz="2800" b="0" dirty="0">
+                <a:latin typeface="Aptos" panose="020B0004020202020204" pitchFamily="34" charset="0"/>
+              </a:rPr>
               <a:t> </a:t>
             </a:r>
             <a:r>
-              <a:rPr lang="it-IT" sz="2800" b="0" dirty="0" err="1"/>
+              <a:rPr lang="it-IT" sz="2800" b="0" dirty="0" err="1">
+                <a:latin typeface="Aptos" panose="020B0004020202020204" pitchFamily="34" charset="0"/>
+              </a:rPr>
               <a:t>Wearable</a:t>
             </a:r>
             <a:r>
-              <a:rPr lang="it-IT" sz="2800" b="0" dirty="0"/>
+              <a:rPr lang="it-IT" sz="2800" b="0" dirty="0">
+                <a:latin typeface="Aptos" panose="020B0004020202020204" pitchFamily="34" charset="0"/>
+              </a:rPr>
               <a:t> Technologies </a:t>
             </a:r>
           </a:p>
           <a:p>
             <a:r>
-              <a:rPr lang="it-IT" sz="2800" b="0" dirty="0"/>
+              <a:rPr lang="it-IT" sz="2800" b="0" dirty="0">
+                <a:latin typeface="Aptos" panose="020B0004020202020204" pitchFamily="34" charset="0"/>
+              </a:rPr>
               <a:t>for Healthcare and </a:t>
             </a:r>
             <a:r>
-              <a:rPr lang="it-IT" sz="2800" b="0" dirty="0" err="1"/>
+              <a:rPr lang="it-IT" sz="2800" b="0" dirty="0" err="1">
+                <a:latin typeface="Aptos" panose="020B0004020202020204" pitchFamily="34" charset="0"/>
+              </a:rPr>
               <a:t>Wellbeing</a:t>
             </a:r>
             <a:r>
-              <a:rPr lang="it-IT" sz="2800" b="0" dirty="0"/>
+              <a:rPr lang="it-IT" sz="2800" b="0" dirty="0">
+                <a:latin typeface="Aptos" panose="020B0004020202020204" pitchFamily="34" charset="0"/>
+              </a:rPr>
               <a:t>  </a:t>
             </a:r>
-            <a:endParaRPr lang="en-GB" sz="2800" b="0" dirty="0"/>
+            <a:endParaRPr lang="en-GB" sz="2800" b="0" dirty="0">
+              <a:latin typeface="Aptos" panose="020B0004020202020204" pitchFamily="34" charset="0"/>
+            </a:endParaRPr>
           </a:p>
         </p:txBody>
       </p:sp>
@@ -5036,8 +5058,10 @@
               </a:spcAft>
             </a:pPr>
             <a:r>
-              <a:rPr lang="it-IT" sz="2800" dirty="0"/>
-              <a:t>A.Y. 2023-2024</a:t>
+              <a:rPr lang="it-IT" sz="2800" dirty="0">
+                <a:latin typeface="Aptos" panose="020B0004020202020204" pitchFamily="34" charset="0"/>
+              </a:rPr>
+              <a:t>A.Y. 2024-2025</a:t>
             </a:r>
           </a:p>
           <a:p>
@@ -5047,7 +5071,9 @@
               </a:spcAft>
             </a:pPr>
             <a:r>
-              <a:rPr lang="it-IT" sz="2800" dirty="0"/>
+              <a:rPr lang="it-IT" sz="2800" dirty="0">
+                <a:latin typeface="Aptos" panose="020B0004020202020204" pitchFamily="34" charset="0"/>
+              </a:rPr>
               <a:t>Giacomo Cappon</a:t>
             </a:r>
           </a:p>
@@ -5087,7 +5113,7 @@
                 <a:effectLst/>
                 <a:uLnTx/>
                 <a:uFillTx/>
-                <a:latin typeface="Palatino Linotype" panose="02040502050505030304" pitchFamily="18" charset="0"/>
+                <a:latin typeface="Aptos" panose="020B0004020202020204" pitchFamily="34" charset="0"/>
                 <a:ea typeface="+mj-ea"/>
                 <a:cs typeface="+mj-cs"/>
               </a:rPr>
@@ -5104,7 +5130,7 @@
                 <a:effectLst/>
                 <a:uLnTx/>
                 <a:uFillTx/>
-                <a:latin typeface="Palatino Linotype" panose="02040502050505030304" pitchFamily="18" charset="0"/>
+                <a:latin typeface="Aptos" panose="020B0004020202020204" pitchFamily="34" charset="0"/>
                 <a:ea typeface="+mj-ea"/>
                 <a:cs typeface="+mj-cs"/>
               </a:rPr>
@@ -5121,7 +5147,7 @@
                 <a:effectLst/>
                 <a:uLnTx/>
                 <a:uFillTx/>
-                <a:latin typeface="Palatino Linotype" panose="02040502050505030304" pitchFamily="18" charset="0"/>
+                <a:latin typeface="Aptos" panose="020B0004020202020204" pitchFamily="34" charset="0"/>
                 <a:ea typeface="+mj-ea"/>
                 <a:cs typeface="+mj-cs"/>
               </a:rPr>
@@ -5137,7 +5163,7 @@
                 <a:effectLst/>
                 <a:uLnTx/>
                 <a:uFillTx/>
-                <a:latin typeface="Palatino Linotype" panose="02040502050505030304" pitchFamily="18" charset="0"/>
+                <a:latin typeface="Aptos" panose="020B0004020202020204" pitchFamily="34" charset="0"/>
                 <a:ea typeface="+mj-ea"/>
                 <a:cs typeface="+mj-cs"/>
               </a:rPr>
@@ -5154,7 +5180,7 @@
                 <a:effectLst/>
                 <a:uLnTx/>
                 <a:uFillTx/>
-                <a:latin typeface="Palatino Linotype" panose="02040502050505030304" pitchFamily="18" charset="0"/>
+                <a:latin typeface="Aptos" panose="020B0004020202020204" pitchFamily="34" charset="0"/>
                 <a:ea typeface="+mj-ea"/>
                 <a:cs typeface="+mj-cs"/>
               </a:rPr>
@@ -5171,13 +5197,15 @@
                 <a:effectLst/>
                 <a:uLnTx/>
                 <a:uFillTx/>
-                <a:latin typeface="Palatino Linotype" panose="02040502050505030304" pitchFamily="18" charset="0"/>
+                <a:latin typeface="Aptos" panose="020B0004020202020204" pitchFamily="34" charset="0"/>
                 <a:ea typeface="+mj-ea"/>
                 <a:cs typeface="+mj-cs"/>
               </a:rPr>
               <a:t>Engineering</a:t>
             </a:r>
-            <a:endParaRPr lang="en-GB" sz="1100" cap="small" baseline="0" dirty="0"/>
+            <a:endParaRPr lang="en-GB" sz="1100" cap="small" baseline="0" dirty="0">
+              <a:latin typeface="Aptos" panose="020B0004020202020204" pitchFamily="34" charset="0"/>
+            </a:endParaRPr>
           </a:p>
         </p:txBody>
       </p:sp>
@@ -5648,12 +5676,14 @@
                     <a:tint val="75000"/>
                   </a:schemeClr>
                 </a:solidFill>
+                <a:latin typeface="Aptos" panose="020B0004020202020204" pitchFamily="34" charset="0"/>
               </a:defRPr>
             </a:lvl1pPr>
           </a:lstStyle>
           <a:p>
             <a:fld id="{31DE2C5B-556E-47B8-A792-024C2FCA4ACC}" type="slidenum">
               <a:rPr lang="en-GB" smtClean="0"/>
+              <a:pPr/>
               <a:t>‹#›</a:t>
             </a:fld>
             <a:endParaRPr lang="en-GB"/>
@@ -5689,7 +5719,7 @@
           <a:solidFill>
             <a:schemeClr val="tx1"/>
           </a:solidFill>
-          <a:latin typeface="Palatino Linotype" panose="02040502050505030304" pitchFamily="18" charset="0"/>
+          <a:latin typeface="Aptos" panose="020B0004020202020204" pitchFamily="34" charset="0"/>
           <a:ea typeface="+mj-ea"/>
           <a:cs typeface="+mj-cs"/>
         </a:defRPr>
@@ -5712,7 +5742,7 @@
           <a:solidFill>
             <a:schemeClr val="tx1"/>
           </a:solidFill>
-          <a:latin typeface="Palatino Linotype" panose="02040502050505030304" pitchFamily="18" charset="0"/>
+          <a:latin typeface="Aptos" panose="020B0004020202020204" pitchFamily="34" charset="0"/>
           <a:ea typeface="+mn-ea"/>
           <a:cs typeface="+mn-cs"/>
         </a:defRPr>
@@ -5733,7 +5763,7 @@
           <a:solidFill>
             <a:schemeClr val="tx1"/>
           </a:solidFill>
-          <a:latin typeface="Palatino Linotype" panose="02040502050505030304" pitchFamily="18" charset="0"/>
+          <a:latin typeface="Aptos" panose="020B0004020202020204" pitchFamily="34" charset="0"/>
           <a:ea typeface="+mn-ea"/>
           <a:cs typeface="+mn-cs"/>
         </a:defRPr>
@@ -5754,7 +5784,7 @@
           <a:solidFill>
             <a:schemeClr val="tx1"/>
           </a:solidFill>
-          <a:latin typeface="Palatino Linotype" panose="02040502050505030304" pitchFamily="18" charset="0"/>
+          <a:latin typeface="Aptos" panose="020B0004020202020204" pitchFamily="34" charset="0"/>
           <a:ea typeface="+mn-ea"/>
           <a:cs typeface="+mn-cs"/>
         </a:defRPr>
@@ -5775,7 +5805,7 @@
           <a:solidFill>
             <a:schemeClr val="tx1"/>
           </a:solidFill>
-          <a:latin typeface="Palatino Linotype" panose="02040502050505030304" pitchFamily="18" charset="0"/>
+          <a:latin typeface="Aptos" panose="020B0004020202020204" pitchFamily="34" charset="0"/>
           <a:ea typeface="+mn-ea"/>
           <a:cs typeface="+mn-cs"/>
         </a:defRPr>
@@ -5796,7 +5826,7 @@
           <a:solidFill>
             <a:schemeClr val="tx1"/>
           </a:solidFill>
-          <a:latin typeface="Palatino Linotype" panose="02040502050505030304" pitchFamily="18" charset="0"/>
+          <a:latin typeface="Aptos" panose="020B0004020202020204" pitchFamily="34" charset="0"/>
           <a:ea typeface="+mn-ea"/>
           <a:cs typeface="+mn-cs"/>
         </a:defRPr>
@@ -9012,7 +9042,7 @@
         </p:spPr>
         <p:txBody>
           <a:bodyPr>
-            <a:normAutofit fontScale="92500" lnSpcReduction="10000"/>
+            <a:normAutofit fontScale="92500"/>
           </a:bodyPr>
           <a:lstStyle/>
           <a:p>
@@ -9986,7 +10016,7 @@
         </p:spPr>
         <p:txBody>
           <a:bodyPr>
-            <a:normAutofit fontScale="92500" lnSpcReduction="20000"/>
+            <a:normAutofit fontScale="92500" lnSpcReduction="10000"/>
           </a:bodyPr>
           <a:lstStyle/>
           <a:p>
@@ -12681,9 +12711,7 @@
                 <a:effectLst/>
                 <a:uLnTx/>
                 <a:uFillTx/>
-                <a:latin typeface="Palatino Linotype" panose="02040502050505030304" pitchFamily="18" charset="0"/>
-                <a:ea typeface="+mn-ea"/>
-                <a:cs typeface="+mn-cs"/>
+                <a:latin typeface="Aptos" panose="020B0004020202020204" pitchFamily="34" charset="0"/>
               </a:rPr>
               <a:t>Information sheet</a:t>
             </a:r>
@@ -12698,9 +12726,7 @@
                 <a:effectLst/>
                 <a:uLnTx/>
                 <a:uFillTx/>
-                <a:latin typeface="Palatino Linotype" panose="02040502050505030304" pitchFamily="18" charset="0"/>
-                <a:ea typeface="+mn-ea"/>
-                <a:cs typeface="+mn-cs"/>
+                <a:latin typeface="Aptos" panose="020B0004020202020204" pitchFamily="34" charset="0"/>
               </a:rPr>
               <a:t>: document to share the information of the research trial. </a:t>
             </a:r>
@@ -12765,9 +12791,7 @@
                 <a:effectLst/>
                 <a:uLnTx/>
                 <a:uFillTx/>
-                <a:latin typeface="Palatino Linotype" panose="02040502050505030304" pitchFamily="18" charset="0"/>
-                <a:ea typeface="+mn-ea"/>
-                <a:cs typeface="+mn-cs"/>
+                <a:latin typeface="Aptos" panose="020B0004020202020204" pitchFamily="34" charset="0"/>
               </a:rPr>
               <a:t>Consent form</a:t>
             </a:r>
@@ -12782,9 +12806,7 @@
                 <a:effectLst/>
                 <a:uLnTx/>
                 <a:uFillTx/>
-                <a:latin typeface="Palatino Linotype" panose="02040502050505030304" pitchFamily="18" charset="0"/>
-                <a:ea typeface="+mn-ea"/>
-                <a:cs typeface="+mn-cs"/>
+                <a:latin typeface="Aptos" panose="020B0004020202020204" pitchFamily="34" charset="0"/>
               </a:rPr>
               <a:t>: form by which the subject provides the consent and agree to participate in the study.  </a:t>
             </a:r>
@@ -14658,7 +14680,7 @@
         <p:spPr/>
         <p:txBody>
           <a:bodyPr>
-            <a:normAutofit fontScale="90000"/>
+            <a:normAutofit/>
           </a:bodyPr>
           <a:lstStyle/>
           <a:p>
@@ -15644,7 +15666,7 @@
         <p:spPr/>
         <p:txBody>
           <a:bodyPr>
-            <a:normAutofit fontScale="90000"/>
+            <a:normAutofit/>
           </a:bodyPr>
           <a:lstStyle/>
           <a:p>
@@ -18391,7 +18413,7 @@
         <p:spPr/>
         <p:txBody>
           <a:bodyPr>
-            <a:normAutofit lnSpcReduction="10000"/>
+            <a:normAutofit/>
           </a:bodyPr>
           <a:lstStyle/>
           <a:p>

--- a/theory_12-regulation_on_data_protection/theory_12-regulation_on_data_protection.pptx
+++ b/theory_12-regulation_on_data_protection/theory_12-regulation_on_data_protection.pptx
@@ -142,6 +142,9 @@
     <p:ext uri="{EFAFB233-063F-42B5-8137-9DF3F51BA10A}">
       <p15:sldGuideLst xmlns:p15="http://schemas.microsoft.com/office/powerpoint/2012/main"/>
     </p:ext>
+    <p:ext uri="{2D200454-40CA-4A62-9FC3-DE9A4176ACB9}">
+      <p15:notesGuideLst xmlns:p15="http://schemas.microsoft.com/office/powerpoint/2012/main"/>
+    </p:ext>
   </p:extLst>
 </p:presentation>
 </file>
@@ -228,7 +231,7 @@
           <a:p>
             <a:fld id="{251090E0-FB0C-49E9-9864-9F53EABEA96F}" type="datetimeFigureOut">
               <a:rPr lang="en-GB" smtClean="0"/>
-              <a:t>05/05/2025</a:t>
+              <a:t>08/01/2026</a:t>
             </a:fld>
             <a:endParaRPr lang="en-GB"/>
           </a:p>
@@ -16655,7 +16658,7 @@
               <a:rPr lang="en-GB" smtClean="0"/>
               <a:t>4</a:t>
             </a:fld>
-            <a:endParaRPr lang="en-GB"/>
+            <a:endParaRPr lang="en-GB" dirty="0"/>
           </a:p>
         </p:txBody>
       </p:sp>
